--- a/Cortex-Atlas-Executive-Cut.pptx
+++ b/Cortex-Atlas-Executive-Cut.pptx
@@ -7499,7 +7499,7 @@
                 </a:solidFill>
                 <a:latin typeface="Calibri"/>
               </a:rPr>
-              <a:t>Five tools, each carrying its own automation and intelligence</a:t>
+              <a:t>Every tool keeps its as-is job and now carries automation, intelligence, dashboards and Ask Atlas</a:t>
             </a:r>
           </a:p>
         </p:txBody>
@@ -7648,8 +7648,8 @@
         </p:nvSpPr>
         <p:spPr>
           <a:xfrm>
-            <a:off x="1463040" y="1901952"/>
-            <a:ext cx="3383280" cy="548640"/>
+            <a:off x="1463040" y="1883664"/>
+            <a:ext cx="3108960" cy="566928"/>
           </a:xfrm>
           <a:prstGeom prst="rect">
             <a:avLst/>
@@ -7671,7 +7671,7 @@
               </a:spcAft>
             </a:pPr>
             <a:r>
-              <a:rPr sz="1450" b="1">
+              <a:rPr sz="1350" b="1">
                 <a:solidFill>
                   <a:srgbClr val="09131B"/>
                 </a:solidFill>
@@ -7690,8 +7690,8 @@
         </p:nvSpPr>
         <p:spPr>
           <a:xfrm>
-            <a:off x="4892040" y="1901952"/>
-            <a:ext cx="3657600" cy="548640"/>
+            <a:off x="4617720" y="1883664"/>
+            <a:ext cx="3200400" cy="566928"/>
           </a:xfrm>
           <a:prstGeom prst="rect">
             <a:avLst/>
@@ -7713,13 +7713,13 @@
               </a:spcAft>
             </a:pPr>
             <a:r>
-              <a:rPr sz="1150" b="0">
+              <a:rPr sz="1080" b="0">
                 <a:solidFill>
                   <a:srgbClr val="595959"/>
                 </a:solidFill>
                 <a:latin typeface="Calibri"/>
               </a:rPr>
-              <a:t>Combined, role-gated request form and approval chain.</a:t>
+              <a:t>Status-driven, role-gated form; auto-routed on submit.</a:t>
             </a:r>
           </a:p>
         </p:txBody>
@@ -7732,8 +7732,8 @@
         </p:nvSpPr>
         <p:spPr>
           <a:xfrm>
-            <a:off x="8641079" y="1901952"/>
-            <a:ext cx="2743200" cy="548640"/>
+            <a:off x="7955280" y="1883664"/>
+            <a:ext cx="3520440" cy="566928"/>
           </a:xfrm>
           <a:prstGeom prst="rect">
             <a:avLst/>
@@ -7755,13 +7755,13 @@
               </a:spcAft>
             </a:pPr>
             <a:r>
-              <a:rPr sz="1050" b="1">
+              <a:rPr sz="950" b="1">
                 <a:solidFill>
                   <a:srgbClr val="9A5C12"/>
                 </a:solidFill>
                 <a:latin typeface="Calibri"/>
               </a:rPr>
-              <a:t>Duplicate-buy detection · catalogue sync</a:t>
+              <a:t>Auto-status · duplicate detection (AI) · dashboard · Ask Atlas</a:t>
             </a:r>
           </a:p>
         </p:txBody>
@@ -7910,8 +7910,8 @@
         </p:nvSpPr>
         <p:spPr>
           <a:xfrm>
-            <a:off x="1463040" y="2761488"/>
-            <a:ext cx="3383280" cy="548640"/>
+            <a:off x="1463040" y="2743200"/>
+            <a:ext cx="3108960" cy="566928"/>
           </a:xfrm>
           <a:prstGeom prst="rect">
             <a:avLst/>
@@ -7933,7 +7933,7 @@
               </a:spcAft>
             </a:pPr>
             <a:r>
-              <a:rPr sz="1450" b="1">
+              <a:rPr sz="1350" b="1">
                 <a:solidFill>
                   <a:srgbClr val="09131B"/>
                 </a:solidFill>
@@ -7952,8 +7952,8 @@
         </p:nvSpPr>
         <p:spPr>
           <a:xfrm>
-            <a:off x="4892040" y="2761488"/>
-            <a:ext cx="3657600" cy="548640"/>
+            <a:off x="4617720" y="2743200"/>
+            <a:ext cx="3200400" cy="566928"/>
           </a:xfrm>
           <a:prstGeom prst="rect">
             <a:avLst/>
@@ -7975,13 +7975,13 @@
               </a:spcAft>
             </a:pPr>
             <a:r>
-              <a:rPr sz="1150" b="0">
+              <a:rPr sz="1080" b="0">
                 <a:solidFill>
                   <a:srgbClr val="595959"/>
                 </a:solidFill>
                 <a:latin typeface="Calibri"/>
               </a:rPr>
-              <a:t>The system of record — full asset profile, quality, sensitivity.</a:t>
+              <a:t>System of record — asset profile, quality, sensitivity.</a:t>
             </a:r>
           </a:p>
         </p:txBody>
@@ -7994,8 +7994,8 @@
         </p:nvSpPr>
         <p:spPr>
           <a:xfrm>
-            <a:off x="8641079" y="2761488"/>
-            <a:ext cx="2743200" cy="548640"/>
+            <a:off x="7955280" y="2743200"/>
+            <a:ext cx="3520440" cy="566928"/>
           </a:xfrm>
           <a:prstGeom prst="rect">
             <a:avLst/>
@@ -8017,13 +8017,13 @@
               </a:spcAft>
             </a:pPr>
             <a:r>
-              <a:rPr sz="1050" b="1">
+              <a:rPr sz="950" b="1">
                 <a:solidFill>
                   <a:srgbClr val="9A5C12"/>
                 </a:solidFill>
                 <a:latin typeface="Calibri"/>
               </a:rPr>
-              <a:t>PII/PHI auto-classification · quality flags</a:t>
+              <a:t>PII/PHI auto-classify · quality flags (AI) · Ask Atlas</a:t>
             </a:r>
           </a:p>
         </p:txBody>
@@ -8172,8 +8172,8 @@
         </p:nvSpPr>
         <p:spPr>
           <a:xfrm>
-            <a:off x="1463040" y="3621024"/>
-            <a:ext cx="3383280" cy="548640"/>
+            <a:off x="1463040" y="3602736"/>
+            <a:ext cx="3108960" cy="566928"/>
           </a:xfrm>
           <a:prstGeom prst="rect">
             <a:avLst/>
@@ -8195,7 +8195,7 @@
               </a:spcAft>
             </a:pPr>
             <a:r>
-              <a:rPr sz="1450" b="1">
+              <a:rPr sz="1350" b="1">
                 <a:solidFill>
                   <a:srgbClr val="09131B"/>
                 </a:solidFill>
@@ -8214,8 +8214,8 @@
         </p:nvSpPr>
         <p:spPr>
           <a:xfrm>
-            <a:off x="4892040" y="3621024"/>
-            <a:ext cx="3657600" cy="548640"/>
+            <a:off x="4617720" y="3602736"/>
+            <a:ext cx="3200400" cy="566928"/>
           </a:xfrm>
           <a:prstGeom prst="rect">
             <a:avLst/>
@@ -8237,13 +8237,13 @@
               </a:spcAft>
             </a:pPr>
             <a:r>
-              <a:rPr sz="1150" b="0">
+              <a:rPr sz="1080" b="0">
                 <a:solidFill>
                   <a:srgbClr val="595959"/>
                 </a:solidFill>
                 <a:latin typeface="Calibri"/>
               </a:rPr>
-              <a:t>Every metric, with lineage back to its source asset.</a:t>
+              <a:t>Every metric, with lineage to its source asset.</a:t>
             </a:r>
           </a:p>
         </p:txBody>
@@ -8256,8 +8256,8 @@
         </p:nvSpPr>
         <p:spPr>
           <a:xfrm>
-            <a:off x="8641079" y="3621024"/>
-            <a:ext cx="2743200" cy="548640"/>
+            <a:off x="7955280" y="3602736"/>
+            <a:ext cx="3520440" cy="566928"/>
           </a:xfrm>
           <a:prstGeom prst="rect">
             <a:avLst/>
@@ -8279,13 +8279,13 @@
               </a:spcAft>
             </a:pPr>
             <a:r>
-              <a:rPr sz="1050" b="1">
+              <a:rPr sz="950" b="1">
                 <a:solidFill>
                   <a:srgbClr val="9A5C12"/>
                 </a:solidFill>
                 <a:latin typeface="Calibri"/>
               </a:rPr>
-              <a:t>Quality-risk on strategic KPIs</a:t>
+              <a:t>Lineage auto-resolve · source quality-risk (AI) · Ask Atlas</a:t>
             </a:r>
           </a:p>
         </p:txBody>
@@ -8434,8 +8434,8 @@
         </p:nvSpPr>
         <p:spPr>
           <a:xfrm>
-            <a:off x="1463040" y="4480560"/>
-            <a:ext cx="3383280" cy="548640"/>
+            <a:off x="1463040" y="4462272"/>
+            <a:ext cx="3108960" cy="566928"/>
           </a:xfrm>
           <a:prstGeom prst="rect">
             <a:avLst/>
@@ -8457,7 +8457,7 @@
               </a:spcAft>
             </a:pPr>
             <a:r>
-              <a:rPr sz="1450" b="1">
+              <a:rPr sz="1350" b="1">
                 <a:solidFill>
                   <a:srgbClr val="09131B"/>
                 </a:solidFill>
@@ -8476,8 +8476,8 @@
         </p:nvSpPr>
         <p:spPr>
           <a:xfrm>
-            <a:off x="4892040" y="4480560"/>
-            <a:ext cx="3657600" cy="548640"/>
+            <a:off x="4617720" y="4462272"/>
+            <a:ext cx="3200400" cy="566928"/>
           </a:xfrm>
           <a:prstGeom prst="rect">
             <a:avLst/>
@@ -8499,13 +8499,13 @@
               </a:spcAft>
             </a:pPr>
             <a:r>
-              <a:rPr sz="1150" b="0">
+              <a:rPr sz="1080" b="0">
                 <a:solidFill>
                   <a:srgbClr val="595959"/>
                 </a:solidFill>
                 <a:latin typeface="Calibri"/>
               </a:rPr>
-              <a:t>Vendor inventory — what they hold, purchased vs available.</a:t>
+              <a:t>Vendor inventory — purchased vs available.</a:t>
             </a:r>
           </a:p>
         </p:txBody>
@@ -8518,8 +8518,8 @@
         </p:nvSpPr>
         <p:spPr>
           <a:xfrm>
-            <a:off x="8641079" y="4480560"/>
-            <a:ext cx="2743200" cy="548640"/>
+            <a:off x="7955280" y="4462272"/>
+            <a:ext cx="3520440" cy="566928"/>
           </a:xfrm>
           <a:prstGeom prst="rect">
             <a:avLst/>
@@ -8541,13 +8541,13 @@
               </a:spcAft>
             </a:pPr>
             <a:r>
-              <a:rPr sz="1050" b="1">
+              <a:rPr sz="950" b="1">
                 <a:solidFill>
                   <a:srgbClr val="9A5C12"/>
                 </a:solidFill>
                 <a:latin typeface="Calibri"/>
               </a:rPr>
-              <a:t>Foundation for the value layer</a:t>
+              <a:t>Rollups · Vendor Hub Plus value &amp; HHI (AI) · Ask Atlas</a:t>
             </a:r>
           </a:p>
         </p:txBody>
@@ -8696,8 +8696,8 @@
         </p:nvSpPr>
         <p:spPr>
           <a:xfrm>
-            <a:off x="1463040" y="5340096"/>
-            <a:ext cx="3383280" cy="548640"/>
+            <a:off x="1463040" y="5321808"/>
+            <a:ext cx="3108960" cy="566928"/>
           </a:xfrm>
           <a:prstGeom prst="rect">
             <a:avLst/>
@@ -8719,7 +8719,7 @@
               </a:spcAft>
             </a:pPr>
             <a:r>
-              <a:rPr sz="1450" b="1">
+              <a:rPr sz="1350" b="1">
                 <a:solidFill>
                   <a:srgbClr val="09131B"/>
                 </a:solidFill>
@@ -8738,8 +8738,8 @@
         </p:nvSpPr>
         <p:spPr>
           <a:xfrm>
-            <a:off x="4892040" y="5340096"/>
-            <a:ext cx="3657600" cy="548640"/>
+            <a:off x="4617720" y="5321808"/>
+            <a:ext cx="3200400" cy="566928"/>
           </a:xfrm>
           <a:prstGeom prst="rect">
             <a:avLst/>
@@ -8761,7 +8761,7 @@
               </a:spcAft>
             </a:pPr>
             <a:r>
-              <a:rPr sz="1150" b="0">
+              <a:rPr sz="1080" b="0">
                 <a:solidFill>
                   <a:srgbClr val="595959"/>
                 </a:solidFill>
@@ -8780,8 +8780,8 @@
         </p:nvSpPr>
         <p:spPr>
           <a:xfrm>
-            <a:off x="8641079" y="5340096"/>
-            <a:ext cx="2743200" cy="548640"/>
+            <a:off x="7955280" y="5321808"/>
+            <a:ext cx="3520440" cy="566928"/>
           </a:xfrm>
           <a:prstGeom prst="rect">
             <a:avLst/>
@@ -8803,13 +8803,13 @@
               </a:spcAft>
             </a:pPr>
             <a:r>
-              <a:rPr sz="1050" b="1">
+              <a:rPr sz="950" b="1">
                 <a:solidFill>
                   <a:srgbClr val="9A5C12"/>
                 </a:solidFill>
                 <a:latin typeface="Calibri"/>
               </a:rPr>
-              <a:t>30/60/90 reminders · renewal prediction</a:t>
+              <a:t>30/60/90 reminders · renewal prediction (AI) · dashboard</a:t>
             </a:r>
           </a:p>
         </p:txBody>
